--- a/assessments/HS-LS1-1/slides/Day_5_Same_DNA_different_jobs.pptx
+++ b/assessments/HS-LS1-1/slides/Day_5_Same_DNA_different_jobs.pptx
@@ -4409,7 +4409,7 @@
               </a:defRPr>
             </a:pPr>
             <a:r>
-              <a:t>Part C: where does the changed protein work?</a:t>
+              <a:t>Part C: where does the protein work?</a:t>
             </a:r>
           </a:p>
         </p:txBody>

--- a/assessments/HS-LS1-1/slides/Day_5_Same_DNA_different_jobs.pptx
+++ b/assessments/HS-LS1-1/slides/Day_5_Same_DNA_different_jobs.pptx
@@ -3205,7 +3205,7 @@
               </a:defRPr>
             </a:pPr>
             <a:r>
-              <a:t>• Today's target: DNA, through proteins, gives different cells their different jobs (LS1-1.5)</a:t>
+              <a:t>• Today's target: DNA, through proteins, gives different cells their different jobs (LS1-1.4)</a:t>
             </a:r>
           </a:p>
         </p:txBody>
@@ -5056,7 +5056,7 @@
               </a:defRPr>
             </a:pPr>
             <a:r>
-              <a:t>• Then: Exit ticket CFA LS1-1.5 (6 minutes).</a:t>
+              <a:t>• Then: Exit ticket CFA LS1-1.4 (6 minutes).</a:t>
             </a:r>
           </a:p>
         </p:txBody>
